--- a/PS1/PS1.pptx
+++ b/PS1/PS1.pptx
@@ -7,6 +7,7 @@
   <p:sldIdLst>
     <p:sldId id="256" r:id="rId2"/>
     <p:sldId id="257" r:id="rId3"/>
+    <p:sldId id="258" r:id="rId4"/>
   </p:sldIdLst>
   <p:sldSz cx="12192000" cy="6858000"/>
   <p:notesSz cx="6858000" cy="9144000"/>
@@ -105,6 +106,11 @@
       </a:defRPr>
     </a:lvl9pPr>
   </p:defaultTextStyle>
+  <p:extLst>
+    <p:ext uri="{EFAFB233-063F-42B5-8137-9DF3F51BA10A}">
+      <p15:sldGuideLst xmlns:p15="http://schemas.microsoft.com/office/powerpoint/2012/main"/>
+    </p:ext>
+  </p:extLst>
 </p:presentation>
 </file>
 
@@ -255,7 +261,7 @@
           <a:p>
             <a:fld id="{2042A716-9F04-40A4-838B-7A1F764D50D7}" type="datetimeFigureOut">
               <a:rPr lang="zh-CN" altLang="en-US" smtClean="0"/>
-              <a:t>2026/10/8</a:t>
+              <a:t>2026/10/9</a:t>
             </a:fld>
             <a:endParaRPr lang="zh-CN" altLang="en-US"/>
           </a:p>
@@ -453,7 +459,7 @@
           <a:p>
             <a:fld id="{2042A716-9F04-40A4-838B-7A1F764D50D7}" type="datetimeFigureOut">
               <a:rPr lang="zh-CN" altLang="en-US" smtClean="0"/>
-              <a:t>2026/10/8</a:t>
+              <a:t>2026/10/9</a:t>
             </a:fld>
             <a:endParaRPr lang="zh-CN" altLang="en-US"/>
           </a:p>
@@ -661,7 +667,7 @@
           <a:p>
             <a:fld id="{2042A716-9F04-40A4-838B-7A1F764D50D7}" type="datetimeFigureOut">
               <a:rPr lang="zh-CN" altLang="en-US" smtClean="0"/>
-              <a:t>2026/10/8</a:t>
+              <a:t>2026/10/9</a:t>
             </a:fld>
             <a:endParaRPr lang="zh-CN" altLang="en-US"/>
           </a:p>
@@ -859,7 +865,7 @@
           <a:p>
             <a:fld id="{2042A716-9F04-40A4-838B-7A1F764D50D7}" type="datetimeFigureOut">
               <a:rPr lang="zh-CN" altLang="en-US" smtClean="0"/>
-              <a:t>2026/10/8</a:t>
+              <a:t>2026/10/9</a:t>
             </a:fld>
             <a:endParaRPr lang="zh-CN" altLang="en-US"/>
           </a:p>
@@ -1134,7 +1140,7 @@
           <a:p>
             <a:fld id="{2042A716-9F04-40A4-838B-7A1F764D50D7}" type="datetimeFigureOut">
               <a:rPr lang="zh-CN" altLang="en-US" smtClean="0"/>
-              <a:t>2026/10/8</a:t>
+              <a:t>2026/10/9</a:t>
             </a:fld>
             <a:endParaRPr lang="zh-CN" altLang="en-US"/>
           </a:p>
@@ -1399,7 +1405,7 @@
           <a:p>
             <a:fld id="{2042A716-9F04-40A4-838B-7A1F764D50D7}" type="datetimeFigureOut">
               <a:rPr lang="zh-CN" altLang="en-US" smtClean="0"/>
-              <a:t>2026/10/8</a:t>
+              <a:t>2026/10/9</a:t>
             </a:fld>
             <a:endParaRPr lang="zh-CN" altLang="en-US"/>
           </a:p>
@@ -1811,7 +1817,7 @@
           <a:p>
             <a:fld id="{2042A716-9F04-40A4-838B-7A1F764D50D7}" type="datetimeFigureOut">
               <a:rPr lang="zh-CN" altLang="en-US" smtClean="0"/>
-              <a:t>2026/10/8</a:t>
+              <a:t>2026/10/9</a:t>
             </a:fld>
             <a:endParaRPr lang="zh-CN" altLang="en-US"/>
           </a:p>
@@ -1952,7 +1958,7 @@
           <a:p>
             <a:fld id="{2042A716-9F04-40A4-838B-7A1F764D50D7}" type="datetimeFigureOut">
               <a:rPr lang="zh-CN" altLang="en-US" smtClean="0"/>
-              <a:t>2026/10/8</a:t>
+              <a:t>2026/10/9</a:t>
             </a:fld>
             <a:endParaRPr lang="zh-CN" altLang="en-US"/>
           </a:p>
@@ -2065,7 +2071,7 @@
           <a:p>
             <a:fld id="{2042A716-9F04-40A4-838B-7A1F764D50D7}" type="datetimeFigureOut">
               <a:rPr lang="zh-CN" altLang="en-US" smtClean="0"/>
-              <a:t>2026/10/8</a:t>
+              <a:t>2026/10/9</a:t>
             </a:fld>
             <a:endParaRPr lang="zh-CN" altLang="en-US"/>
           </a:p>
@@ -2376,7 +2382,7 @@
           <a:p>
             <a:fld id="{2042A716-9F04-40A4-838B-7A1F764D50D7}" type="datetimeFigureOut">
               <a:rPr lang="zh-CN" altLang="en-US" smtClean="0"/>
-              <a:t>2026/10/8</a:t>
+              <a:t>2026/10/9</a:t>
             </a:fld>
             <a:endParaRPr lang="zh-CN" altLang="en-US"/>
           </a:p>
@@ -2664,7 +2670,7 @@
           <a:p>
             <a:fld id="{2042A716-9F04-40A4-838B-7A1F764D50D7}" type="datetimeFigureOut">
               <a:rPr lang="zh-CN" altLang="en-US" smtClean="0"/>
-              <a:t>2026/10/8</a:t>
+              <a:t>2026/10/9</a:t>
             </a:fld>
             <a:endParaRPr lang="zh-CN" altLang="en-US"/>
           </a:p>
@@ -2905,7 +2911,7 @@
           <a:p>
             <a:fld id="{2042A716-9F04-40A4-838B-7A1F764D50D7}" type="datetimeFigureOut">
               <a:rPr lang="zh-CN" altLang="en-US" smtClean="0"/>
-              <a:t>2026/10/8</a:t>
+              <a:t>2026/10/9</a:t>
             </a:fld>
             <a:endParaRPr lang="zh-CN" altLang="en-US"/>
           </a:p>
@@ -5537,6 +5543,322 @@
 </p:sld>
 </file>
 
+<file path=ppt/slides/slide3.xml><?xml version="1.0" encoding="utf-8"?>
+<p:sld xmlns:a="http://schemas.openxmlformats.org/drawingml/2006/main" xmlns:r="http://schemas.openxmlformats.org/officeDocument/2006/relationships" xmlns:p="http://schemas.openxmlformats.org/presentationml/2006/main">
+  <p:cSld>
+    <p:spTree>
+      <p:nvGrpSpPr>
+        <p:cNvPr id="1" name=""/>
+        <p:cNvGrpSpPr/>
+        <p:nvPr/>
+      </p:nvGrpSpPr>
+      <p:grpSpPr>
+        <a:xfrm>
+          <a:off x="0" y="0"/>
+          <a:ext cx="0" cy="0"/>
+          <a:chOff x="0" y="0"/>
+          <a:chExt cx="0" cy="0"/>
+        </a:xfrm>
+      </p:grpSpPr>
+      <p:pic>
+        <p:nvPicPr>
+          <p:cNvPr id="3" name="图片 2">
+            <a:extLst>
+              <a:ext uri="{FF2B5EF4-FFF2-40B4-BE49-F238E27FC236}">
+                <a16:creationId xmlns:a16="http://schemas.microsoft.com/office/drawing/2014/main" id="{F303A9A9-454E-DE6E-ED21-8997A142B5AC}"/>
+              </a:ext>
+            </a:extLst>
+          </p:cNvPr>
+          <p:cNvPicPr>
+            <a:picLocks noChangeAspect="1"/>
+          </p:cNvPicPr>
+          <p:nvPr/>
+        </p:nvPicPr>
+        <p:blipFill>
+          <a:blip r:embed="rId2">
+            <a:clrChange>
+              <a:clrFrom>
+                <a:srgbClr val="E4F5FB"/>
+              </a:clrFrom>
+              <a:clrTo>
+                <a:srgbClr val="E4F5FB">
+                  <a:alpha val="0"/>
+                </a:srgbClr>
+              </a:clrTo>
+            </a:clrChange>
+            <a:extLst>
+              <a:ext uri="{28A0092B-C50C-407E-A947-70E740481C1C}">
+                <a14:useLocalDpi xmlns:a14="http://schemas.microsoft.com/office/drawing/2010/main" val="0"/>
+              </a:ext>
+            </a:extLst>
+          </a:blip>
+          <a:stretch>
+            <a:fillRect/>
+          </a:stretch>
+        </p:blipFill>
+        <p:spPr>
+          <a:xfrm>
+            <a:off x="2324635" y="965378"/>
+            <a:ext cx="4997003" cy="4138143"/>
+          </a:xfrm>
+          <a:prstGeom prst="rect">
+            <a:avLst/>
+          </a:prstGeom>
+        </p:spPr>
+      </p:pic>
+      <p:sp>
+        <p:nvSpPr>
+          <p:cNvPr id="6" name="文本框 5">
+            <a:extLst>
+              <a:ext uri="{FF2B5EF4-FFF2-40B4-BE49-F238E27FC236}">
+                <a16:creationId xmlns:a16="http://schemas.microsoft.com/office/drawing/2014/main" id="{2CA0F717-C07D-8615-FFAF-9B7C56A3BB62}"/>
+              </a:ext>
+            </a:extLst>
+          </p:cNvPr>
+          <p:cNvSpPr txBox="1"/>
+          <p:nvPr/>
+        </p:nvSpPr>
+        <p:spPr>
+          <a:xfrm>
+            <a:off x="2975019" y="4230709"/>
+            <a:ext cx="399245" cy="369332"/>
+          </a:xfrm>
+          <a:prstGeom prst="rect">
+            <a:avLst/>
+          </a:prstGeom>
+          <a:noFill/>
+        </p:spPr>
+        <p:txBody>
+          <a:bodyPr wrap="square" rtlCol="0">
+            <a:spAutoFit/>
+          </a:bodyPr>
+          <a:lstStyle/>
+          <a:p>
+            <a:r>
+              <a:rPr lang="en-US" altLang="zh-CN" i="1" dirty="0" err="1">
+                <a:solidFill>
+                  <a:srgbClr val="C00000"/>
+                </a:solidFill>
+                <a:latin typeface="Arial" panose="020B0604020202020204" pitchFamily="34" charset="0"/>
+                <a:cs typeface="Arial" panose="020B0604020202020204" pitchFamily="34" charset="0"/>
+              </a:rPr>
+              <a:t>i</a:t>
+            </a:r>
+            <a:endParaRPr lang="zh-CN" altLang="en-US" i="1" dirty="0">
+              <a:solidFill>
+                <a:srgbClr val="C00000"/>
+              </a:solidFill>
+              <a:latin typeface="Arial" panose="020B0604020202020204" pitchFamily="34" charset="0"/>
+              <a:cs typeface="Arial" panose="020B0604020202020204" pitchFamily="34" charset="0"/>
+            </a:endParaRPr>
+          </a:p>
+        </p:txBody>
+      </p:sp>
+      <p:sp>
+        <p:nvSpPr>
+          <p:cNvPr id="8" name="文本框 7">
+            <a:extLst>
+              <a:ext uri="{FF2B5EF4-FFF2-40B4-BE49-F238E27FC236}">
+                <a16:creationId xmlns:a16="http://schemas.microsoft.com/office/drawing/2014/main" id="{6C3139CB-DCEA-A76A-5E43-DB1DA1B20E5E}"/>
+              </a:ext>
+            </a:extLst>
+          </p:cNvPr>
+          <p:cNvSpPr txBox="1"/>
+          <p:nvPr/>
+        </p:nvSpPr>
+        <p:spPr>
+          <a:xfrm>
+            <a:off x="3090930" y="3597498"/>
+            <a:ext cx="682579" cy="369332"/>
+          </a:xfrm>
+          <a:prstGeom prst="rect">
+            <a:avLst/>
+          </a:prstGeom>
+          <a:noFill/>
+        </p:spPr>
+        <p:txBody>
+          <a:bodyPr wrap="square" rtlCol="0">
+            <a:spAutoFit/>
+          </a:bodyPr>
+          <a:lstStyle/>
+          <a:p>
+            <a:r>
+              <a:rPr lang="en-US" altLang="zh-CN" i="1" dirty="0">
+                <a:solidFill>
+                  <a:srgbClr val="C00000"/>
+                </a:solidFill>
+                <a:latin typeface="Arial" panose="020B0604020202020204" pitchFamily="34" charset="0"/>
+                <a:cs typeface="Arial" panose="020B0604020202020204" pitchFamily="34" charset="0"/>
+              </a:rPr>
+              <a:t>i-1</a:t>
+            </a:r>
+            <a:endParaRPr lang="zh-CN" altLang="en-US" i="1" dirty="0">
+              <a:solidFill>
+                <a:srgbClr val="C00000"/>
+              </a:solidFill>
+              <a:latin typeface="Arial" panose="020B0604020202020204" pitchFamily="34" charset="0"/>
+              <a:cs typeface="Arial" panose="020B0604020202020204" pitchFamily="34" charset="0"/>
+            </a:endParaRPr>
+          </a:p>
+        </p:txBody>
+      </p:sp>
+      <p:sp>
+        <p:nvSpPr>
+          <p:cNvPr id="10" name="文本框 9">
+            <a:extLst>
+              <a:ext uri="{FF2B5EF4-FFF2-40B4-BE49-F238E27FC236}">
+                <a16:creationId xmlns:a16="http://schemas.microsoft.com/office/drawing/2014/main" id="{1B99F091-BF05-5304-B983-B068441F50B4}"/>
+              </a:ext>
+            </a:extLst>
+          </p:cNvPr>
+          <p:cNvSpPr txBox="1"/>
+          <p:nvPr/>
+        </p:nvSpPr>
+        <p:spPr>
+          <a:xfrm>
+            <a:off x="4151289" y="4827430"/>
+            <a:ext cx="399245" cy="369332"/>
+          </a:xfrm>
+          <a:prstGeom prst="rect">
+            <a:avLst/>
+          </a:prstGeom>
+          <a:noFill/>
+        </p:spPr>
+        <p:txBody>
+          <a:bodyPr wrap="square" rtlCol="0">
+            <a:spAutoFit/>
+          </a:bodyPr>
+          <a:lstStyle/>
+          <a:p>
+            <a:r>
+              <a:rPr lang="en-US" altLang="zh-CN" i="1" dirty="0">
+                <a:solidFill>
+                  <a:srgbClr val="C00000"/>
+                </a:solidFill>
+                <a:latin typeface="Arial" panose="020B0604020202020204" pitchFamily="34" charset="0"/>
+                <a:cs typeface="Arial" panose="020B0604020202020204" pitchFamily="34" charset="0"/>
+              </a:rPr>
+              <a:t>j</a:t>
+            </a:r>
+            <a:endParaRPr lang="zh-CN" altLang="en-US" i="1" dirty="0">
+              <a:solidFill>
+                <a:srgbClr val="C00000"/>
+              </a:solidFill>
+              <a:latin typeface="Arial" panose="020B0604020202020204" pitchFamily="34" charset="0"/>
+              <a:cs typeface="Arial" panose="020B0604020202020204" pitchFamily="34" charset="0"/>
+            </a:endParaRPr>
+          </a:p>
+        </p:txBody>
+      </p:sp>
+      <p:sp>
+        <p:nvSpPr>
+          <p:cNvPr id="14" name="文本框 13">
+            <a:extLst>
+              <a:ext uri="{FF2B5EF4-FFF2-40B4-BE49-F238E27FC236}">
+                <a16:creationId xmlns:a16="http://schemas.microsoft.com/office/drawing/2014/main" id="{64DC318B-781F-178F-4311-627D4ACEBF99}"/>
+              </a:ext>
+            </a:extLst>
+          </p:cNvPr>
+          <p:cNvSpPr txBox="1"/>
+          <p:nvPr/>
+        </p:nvSpPr>
+        <p:spPr>
+          <a:xfrm>
+            <a:off x="3721991" y="3333619"/>
+            <a:ext cx="521596" cy="369332"/>
+          </a:xfrm>
+          <a:prstGeom prst="rect">
+            <a:avLst/>
+          </a:prstGeom>
+          <a:noFill/>
+        </p:spPr>
+        <p:txBody>
+          <a:bodyPr wrap="square" rtlCol="0">
+            <a:spAutoFit/>
+          </a:bodyPr>
+          <a:lstStyle/>
+          <a:p>
+            <a:r>
+              <a:rPr lang="en-US" altLang="zh-CN" i="1" dirty="0">
+                <a:solidFill>
+                  <a:srgbClr val="C00000"/>
+                </a:solidFill>
+                <a:latin typeface="Arial" panose="020B0604020202020204" pitchFamily="34" charset="0"/>
+                <a:cs typeface="Arial" panose="020B0604020202020204" pitchFamily="34" charset="0"/>
+              </a:rPr>
+              <a:t>j-1</a:t>
+            </a:r>
+            <a:endParaRPr lang="zh-CN" altLang="en-US" i="1" dirty="0">
+              <a:solidFill>
+                <a:srgbClr val="C00000"/>
+              </a:solidFill>
+              <a:latin typeface="Arial" panose="020B0604020202020204" pitchFamily="34" charset="0"/>
+              <a:cs typeface="Arial" panose="020B0604020202020204" pitchFamily="34" charset="0"/>
+            </a:endParaRPr>
+          </a:p>
+        </p:txBody>
+      </p:sp>
+      <p:sp>
+        <p:nvSpPr>
+          <p:cNvPr id="16" name="文本框 15">
+            <a:extLst>
+              <a:ext uri="{FF2B5EF4-FFF2-40B4-BE49-F238E27FC236}">
+                <a16:creationId xmlns:a16="http://schemas.microsoft.com/office/drawing/2014/main" id="{73BF6BC3-B34D-8C6C-9574-98AD3D51D063}"/>
+              </a:ext>
+            </a:extLst>
+          </p:cNvPr>
+          <p:cNvSpPr txBox="1"/>
+          <p:nvPr/>
+        </p:nvSpPr>
+        <p:spPr>
+          <a:xfrm>
+            <a:off x="4350911" y="3333619"/>
+            <a:ext cx="521596" cy="369332"/>
+          </a:xfrm>
+          <a:prstGeom prst="rect">
+            <a:avLst/>
+          </a:prstGeom>
+          <a:noFill/>
+        </p:spPr>
+        <p:txBody>
+          <a:bodyPr wrap="square" rtlCol="0">
+            <a:spAutoFit/>
+          </a:bodyPr>
+          <a:lstStyle/>
+          <a:p>
+            <a:r>
+              <a:rPr lang="en-US" altLang="zh-CN" i="1" dirty="0">
+                <a:solidFill>
+                  <a:srgbClr val="C00000"/>
+                </a:solidFill>
+                <a:latin typeface="Arial" panose="020B0604020202020204" pitchFamily="34" charset="0"/>
+                <a:cs typeface="Arial" panose="020B0604020202020204" pitchFamily="34" charset="0"/>
+              </a:rPr>
+              <a:t>j</a:t>
+            </a:r>
+            <a:endParaRPr lang="zh-CN" altLang="en-US" i="1" dirty="0">
+              <a:solidFill>
+                <a:srgbClr val="C00000"/>
+              </a:solidFill>
+              <a:latin typeface="Arial" panose="020B0604020202020204" pitchFamily="34" charset="0"/>
+              <a:cs typeface="Arial" panose="020B0604020202020204" pitchFamily="34" charset="0"/>
+            </a:endParaRPr>
+          </a:p>
+        </p:txBody>
+      </p:sp>
+    </p:spTree>
+    <p:extLst>
+      <p:ext uri="{BB962C8B-B14F-4D97-AF65-F5344CB8AC3E}">
+        <p14:creationId xmlns:p14="http://schemas.microsoft.com/office/powerpoint/2010/main" val="2325625655"/>
+      </p:ext>
+    </p:extLst>
+  </p:cSld>
+  <p:clrMapOvr>
+    <a:masterClrMapping/>
+  </p:clrMapOvr>
+</p:sld>
+</file>
+
 <file path=ppt/theme/theme1.xml><?xml version="1.0" encoding="utf-8"?>
 <a:theme xmlns:a="http://schemas.openxmlformats.org/drawingml/2006/main" name="Office 主题​​">
   <a:themeElements>
